--- a/it/slides/16-Architettura_dei_Calcolatori-Memoria_Permanente-Lab.pptx
+++ b/it/slides/16-Architettura_dei_Calcolatori-Memoria_Permanente-Lab.pptx
@@ -119,18 +119,18 @@
   <p:extLst>
     <p:ext uri="{521415D9-36F7-43E2-AB2F-B90AF26B5E84}">
       <p14:sectionLst xmlns:p14="http://schemas.microsoft.com/office/powerpoint/2010/main">
-        <p14:section name="Apertura" id="{32a9509f-2c2f-3bef-9dda-588766ea7158}">
+        <p14:section name="Apertura" id="{6c6b8f63-4aff-9ce3-87c9-998404d79cb5}">
           <p14:sldIdLst>
             <p14:sldId id="256"/>
             <p14:sldId id="257"/>
           </p14:sldIdLst>
         </p14:section>
-        <p14:section name="Riscaldamento sulla macchina" id="{deaeccbb-0cc9-1e3e-0323-2851e0109fe7}">
+        <p14:section name="Riscaldamento sulla macchina" id="{6738d782-fe0e-9d92-8997-3b806c65710d}">
           <p14:sldIdLst>
             <p14:sldId id="258"/>
           </p14:sldIdLst>
         </p14:section>
-        <p14:section name="Il programma completo" id="{633e5a7f-c4b3-18ed-13d5-77abdaec7d1a}">
+        <p14:section name="Il programma completo" id="{f799cdea-7b8e-7fd0-bd34-c5e124662211}">
           <p14:sldIdLst>
             <p14:sldId id="259"/>
             <p14:sldId id="260"/>
@@ -138,7 +138,7 @@
             <p14:sldId id="262"/>
           </p14:sldIdLst>
         </p14:section>
-        <p14:section name="Eseguire e provare" id="{87fee756-872c-5b89-7645-c2eebf9dd5a9}">
+        <p14:section name="Eseguire e provare" id="{7e9557b8-9952-79cb-6abc-d4ae70862778}">
           <p14:sldIdLst>
             <p14:sldId id="263"/>
             <p14:sldId id="264"/>
@@ -147,7 +147,7 @@
             <p14:sldId id="267"/>
           </p14:sldIdLst>
         </p14:section>
-        <p14:section name="Esercizi" id="{de6ff789-8496-b831-5df1-5048e75cdaca}">
+        <p14:section name="Esercizi" id="{bb379507-51ab-552e-a1f1-a4b08952fc38}">
           <p14:sldIdLst>
             <p14:sldId id="268"/>
           </p14:sldIdLst>

--- a/it/slides/16-Architettura_dei_Calcolatori-Memoria_Permanente-Lab.pptx
+++ b/it/slides/16-Architettura_dei_Calcolatori-Memoria_Permanente-Lab.pptx
@@ -119,18 +119,18 @@
   <p:extLst>
     <p:ext uri="{521415D9-36F7-43E2-AB2F-B90AF26B5E84}">
       <p14:sectionLst xmlns:p14="http://schemas.microsoft.com/office/powerpoint/2010/main">
-        <p14:section name="Apertura" id="{6c6b8f63-4aff-9ce3-87c9-998404d79cb5}">
+        <p14:section name="Apertura" id="{16d255d0-4dc6-7a85-20c5-b131894f3527}">
           <p14:sldIdLst>
             <p14:sldId id="256"/>
             <p14:sldId id="257"/>
           </p14:sldIdLst>
         </p14:section>
-        <p14:section name="Riscaldamento sulla macchina" id="{6738d782-fe0e-9d92-8997-3b806c65710d}">
+        <p14:section name="Riscaldamento sulla macchina" id="{4d144bb2-7f91-f910-a7ff-4bfefdaeb0c0}">
           <p14:sldIdLst>
             <p14:sldId id="258"/>
           </p14:sldIdLst>
         </p14:section>
-        <p14:section name="Il programma completo" id="{f799cdea-7b8e-7fd0-bd34-c5e124662211}">
+        <p14:section name="Il programma completo" id="{ece9d61a-37d2-d1f4-78af-01d6ef807971}">
           <p14:sldIdLst>
             <p14:sldId id="259"/>
             <p14:sldId id="260"/>
@@ -138,7 +138,7 @@
             <p14:sldId id="262"/>
           </p14:sldIdLst>
         </p14:section>
-        <p14:section name="Eseguire e provare" id="{7e9557b8-9952-79cb-6abc-d4ae70862778}">
+        <p14:section name="Eseguire e provare" id="{5b78f1a7-eaaa-a44f-b6b1-31127af3ccdb}">
           <p14:sldIdLst>
             <p14:sldId id="263"/>
             <p14:sldId id="264"/>
@@ -147,7 +147,7 @@
             <p14:sldId id="267"/>
           </p14:sldIdLst>
         </p14:section>
-        <p14:section name="Esercizi" id="{bb379507-51ab-552e-a1f1-a4b08952fc38}">
+        <p14:section name="Esercizi" id="{9095a936-1a22-c87c-f471-cecaa1a2068f}">
           <p14:sldIdLst>
             <p14:sldId id="268"/>
           </p14:sldIdLst>
@@ -558,7 +558,8 @@
               <a:rPr lang="en-US" dirty="0"/>
               <a:t>Questa è la presentazione del codice della Lezione 16. Mentre la presentazione della lezione sviluppa i concetti, questa raccoglie tutto ciò che si scrive e si esegue: ogni listato con il suo commento, il programma completo della lezione, il risultato che deve produrre, e la procedura per provarlo su ciascuno dei tre host. Le due presentazioni vanno lette insieme: i concetti spiegano il codice, e il codice dà ai concetti una conseguenza osservabile.
 Stato di apprendimento: DA COMPRENDERE OGGI, alla fine di questa lezione lo spiegate, lo seguite passo passo e lo applicate da soli; DA UTILIZZARE OGGI, oggi seguite e usate la ricetta; come funziona dentro si spiega più avanti, o non fa parte del corso; DA COMPRENDERE PIÙ AVANTI, riconoscete il nome e lo scopo; lo spiega una lezione successiva. Una slide senza etichetta è contesto: una storia, un esempio, una domanda, un esercizio.
-Stato di apprendimento di questa lezione. DA COMPRENDERE OGGI: ROM, flash, firmware; l'architettura di von Neumann; la cache; la memoria secondaria. DA UTILIZZARE OGGI: il programma completo, gli strumenti di PRG32 (si usa, non si studia, in questo corso). DA COMPRENDERE PIÙ AVANTI: niente. Una slide senza etichetta è contesto: una storia, un esempio, una domanda, un esercizio.</a:t>
+Stato di apprendimento di questa lezione. DA COMPRENDERE OGGI: ROM, flash, firmware; l'architettura di von Neumann; la cache; la memoria secondaria. DA UTILIZZARE OGGI: il programma completo, gli strumenti di PRG32 (si usa, non si studia, in questo corso). DA COMPRENDERE PIÙ AVANTI: niente. Una slide senza etichetta è contesto: una storia, un esempio, una domanda, un esercizio.
+Percorso. I risultati di oggi: (1) classificare le memorie permanenti e dire dove è conservata la cartuccia; (2) spiegare un successo e un fallimento di cache, e la località; (3) confrontare i tempi di accesso di dischi e memorie a stato solido. Si appoggia su: l'architettura di von Neumann (Lezione 03). Prossimo passo: Lezione 17, Verm1, parte 3: un corpo, regole e stati.</a:t>
             </a:r>
             <a:endParaRPr lang="en-US" dirty="0"/>
           </a:p>
